--- a/Presentation/But It Was Logged.pptx
+++ b/Presentation/But It Was Logged.pptx
@@ -3023,7 +3023,7 @@
           <a:p>
             <a:r>
               <a:rPr lang="en-US" dirty="0"/>
-              <a:t>A practical look at logging with .NET Core</a:t>
+              <a:t>A modern look at logging, telemetry, and more!</a:t>
             </a:r>
           </a:p>
         </p:txBody>
@@ -5251,7 +5251,9 @@
         </p:nvSpPr>
         <p:spPr/>
         <p:txBody>
-          <a:bodyPr/>
+          <a:bodyPr>
+            <a:normAutofit fontScale="92500" lnSpcReduction="10000"/>
+          </a:bodyPr>
           <a:lstStyle/>
           <a:p>
             <a:r>
@@ -5291,6 +5293,19 @@
             <a:r>
               <a:rPr lang="en-US" dirty="0"/>
               <a:t>Allows raw access to plethora of information</a:t>
+            </a:r>
+          </a:p>
+          <a:p>
+            <a:r>
+              <a:rPr lang="en-US" dirty="0"/>
+              <a:t>Aspire?</a:t>
+            </a:r>
+          </a:p>
+          <a:p>
+            <a:pPr lvl="1"/>
+            <a:r>
+              <a:rPr lang="en-US" dirty="0"/>
+              <a:t>It helps, and starts to bridge the gap, but dev only</a:t>
             </a:r>
           </a:p>
           <a:p>
@@ -6068,15 +6083,33 @@
                                   </p:childTnLst>
                                 </p:cTn>
                               </p:par>
+                            </p:childTnLst>
+                          </p:cTn>
+                        </p:par>
+                      </p:childTnLst>
+                    </p:cTn>
+                  </p:par>
+                  <p:par>
+                    <p:cTn id="41" fill="hold">
+                      <p:stCondLst>
+                        <p:cond delay="indefinite"/>
+                      </p:stCondLst>
+                      <p:childTnLst>
+                        <p:par>
+                          <p:cTn id="42" fill="hold">
+                            <p:stCondLst>
+                              <p:cond delay="0"/>
+                            </p:stCondLst>
+                            <p:childTnLst>
                               <p:par>
-                                <p:cTn id="41" presetID="2" presetClass="entr" presetSubtype="4" fill="hold" grpId="0" nodeType="withEffect">
+                                <p:cTn id="43" presetID="2" presetClass="entr" presetSubtype="4" fill="hold" grpId="0" nodeType="clickEffect">
                                   <p:stCondLst>
                                     <p:cond delay="0"/>
                                   </p:stCondLst>
                                   <p:childTnLst>
                                     <p:set>
                                       <p:cBhvr>
-                                        <p:cTn id="42" dur="1" fill="hold">
+                                        <p:cTn id="44" dur="1" fill="hold">
                                           <p:stCondLst>
                                             <p:cond delay="0"/>
                                           </p:stCondLst>
@@ -6098,7 +6131,7 @@
                                     </p:set>
                                     <p:anim calcmode="lin" valueType="num">
                                       <p:cBhvr additive="base">
-                                        <p:cTn id="43" dur="500" fill="hold"/>
+                                        <p:cTn id="45" dur="500" fill="hold"/>
                                         <p:tgtEl>
                                           <p:spTgt spid="3">
                                             <p:txEl>
@@ -6125,11 +6158,181 @@
                                     </p:anim>
                                     <p:anim calcmode="lin" valueType="num">
                                       <p:cBhvr additive="base">
-                                        <p:cTn id="44" dur="500" fill="hold"/>
+                                        <p:cTn id="46" dur="500" fill="hold"/>
                                         <p:tgtEl>
                                           <p:spTgt spid="3">
                                             <p:txEl>
                                               <p:pRg st="8" end="8"/>
+                                            </p:txEl>
+                                          </p:spTgt>
+                                        </p:tgtEl>
+                                        <p:attrNameLst>
+                                          <p:attrName>ppt_y</p:attrName>
+                                        </p:attrNameLst>
+                                      </p:cBhvr>
+                                      <p:tavLst>
+                                        <p:tav tm="0">
+                                          <p:val>
+                                            <p:strVal val="1+#ppt_h/2"/>
+                                          </p:val>
+                                        </p:tav>
+                                        <p:tav tm="100000">
+                                          <p:val>
+                                            <p:strVal val="#ppt_y"/>
+                                          </p:val>
+                                        </p:tav>
+                                      </p:tavLst>
+                                    </p:anim>
+                                  </p:childTnLst>
+                                </p:cTn>
+                              </p:par>
+                              <p:par>
+                                <p:cTn id="47" presetID="2" presetClass="entr" presetSubtype="4" fill="hold" grpId="0" nodeType="withEffect">
+                                  <p:stCondLst>
+                                    <p:cond delay="0"/>
+                                  </p:stCondLst>
+                                  <p:childTnLst>
+                                    <p:set>
+                                      <p:cBhvr>
+                                        <p:cTn id="48" dur="1" fill="hold">
+                                          <p:stCondLst>
+                                            <p:cond delay="0"/>
+                                          </p:stCondLst>
+                                        </p:cTn>
+                                        <p:tgtEl>
+                                          <p:spTgt spid="3">
+                                            <p:txEl>
+                                              <p:pRg st="9" end="9"/>
+                                            </p:txEl>
+                                          </p:spTgt>
+                                        </p:tgtEl>
+                                        <p:attrNameLst>
+                                          <p:attrName>style.visibility</p:attrName>
+                                        </p:attrNameLst>
+                                      </p:cBhvr>
+                                      <p:to>
+                                        <p:strVal val="visible"/>
+                                      </p:to>
+                                    </p:set>
+                                    <p:anim calcmode="lin" valueType="num">
+                                      <p:cBhvr additive="base">
+                                        <p:cTn id="49" dur="500" fill="hold"/>
+                                        <p:tgtEl>
+                                          <p:spTgt spid="3">
+                                            <p:txEl>
+                                              <p:pRg st="9" end="9"/>
+                                            </p:txEl>
+                                          </p:spTgt>
+                                        </p:tgtEl>
+                                        <p:attrNameLst>
+                                          <p:attrName>ppt_x</p:attrName>
+                                        </p:attrNameLst>
+                                      </p:cBhvr>
+                                      <p:tavLst>
+                                        <p:tav tm="0">
+                                          <p:val>
+                                            <p:strVal val="#ppt_x"/>
+                                          </p:val>
+                                        </p:tav>
+                                        <p:tav tm="100000">
+                                          <p:val>
+                                            <p:strVal val="#ppt_x"/>
+                                          </p:val>
+                                        </p:tav>
+                                      </p:tavLst>
+                                    </p:anim>
+                                    <p:anim calcmode="lin" valueType="num">
+                                      <p:cBhvr additive="base">
+                                        <p:cTn id="50" dur="500" fill="hold"/>
+                                        <p:tgtEl>
+                                          <p:spTgt spid="3">
+                                            <p:txEl>
+                                              <p:pRg st="9" end="9"/>
+                                            </p:txEl>
+                                          </p:spTgt>
+                                        </p:tgtEl>
+                                        <p:attrNameLst>
+                                          <p:attrName>ppt_y</p:attrName>
+                                        </p:attrNameLst>
+                                      </p:cBhvr>
+                                      <p:tavLst>
+                                        <p:tav tm="0">
+                                          <p:val>
+                                            <p:strVal val="1+#ppt_h/2"/>
+                                          </p:val>
+                                        </p:tav>
+                                        <p:tav tm="100000">
+                                          <p:val>
+                                            <p:strVal val="#ppt_y"/>
+                                          </p:val>
+                                        </p:tav>
+                                      </p:tavLst>
+                                    </p:anim>
+                                  </p:childTnLst>
+                                </p:cTn>
+                              </p:par>
+                              <p:par>
+                                <p:cTn id="51" presetID="2" presetClass="entr" presetSubtype="4" fill="hold" grpId="0" nodeType="withEffect">
+                                  <p:stCondLst>
+                                    <p:cond delay="0"/>
+                                  </p:stCondLst>
+                                  <p:childTnLst>
+                                    <p:set>
+                                      <p:cBhvr>
+                                        <p:cTn id="52" dur="1" fill="hold">
+                                          <p:stCondLst>
+                                            <p:cond delay="0"/>
+                                          </p:stCondLst>
+                                        </p:cTn>
+                                        <p:tgtEl>
+                                          <p:spTgt spid="3">
+                                            <p:txEl>
+                                              <p:pRg st="10" end="10"/>
+                                            </p:txEl>
+                                          </p:spTgt>
+                                        </p:tgtEl>
+                                        <p:attrNameLst>
+                                          <p:attrName>style.visibility</p:attrName>
+                                        </p:attrNameLst>
+                                      </p:cBhvr>
+                                      <p:to>
+                                        <p:strVal val="visible"/>
+                                      </p:to>
+                                    </p:set>
+                                    <p:anim calcmode="lin" valueType="num">
+                                      <p:cBhvr additive="base">
+                                        <p:cTn id="53" dur="500" fill="hold"/>
+                                        <p:tgtEl>
+                                          <p:spTgt spid="3">
+                                            <p:txEl>
+                                              <p:pRg st="10" end="10"/>
+                                            </p:txEl>
+                                          </p:spTgt>
+                                        </p:tgtEl>
+                                        <p:attrNameLst>
+                                          <p:attrName>ppt_x</p:attrName>
+                                        </p:attrNameLst>
+                                      </p:cBhvr>
+                                      <p:tavLst>
+                                        <p:tav tm="0">
+                                          <p:val>
+                                            <p:strVal val="#ppt_x"/>
+                                          </p:val>
+                                        </p:tav>
+                                        <p:tav tm="100000">
+                                          <p:val>
+                                            <p:strVal val="#ppt_x"/>
+                                          </p:val>
+                                        </p:tav>
+                                      </p:tavLst>
+                                    </p:anim>
+                                    <p:anim calcmode="lin" valueType="num">
+                                      <p:cBhvr additive="base">
+                                        <p:cTn id="54" dur="500" fill="hold"/>
+                                        <p:tgtEl>
+                                          <p:spTgt spid="3">
+                                            <p:txEl>
+                                              <p:pRg st="10" end="10"/>
                                             </p:txEl>
                                           </p:spTgt>
                                         </p:tgtEl>
@@ -8057,8 +8260,17 @@
           <a:p>
             <a:pPr lvl="1"/>
             <a:r>
+              <a:rPr lang="en-US" dirty="0">
+                <a:hlinkClick r:id="rId2"/>
+              </a:rPr>
+              <a:t>https://github.com/mitchelsellers/dotnetcoreloggingdemo</a:t>
+            </a:r>
+            <a:endParaRPr lang="en-US" dirty="0"/>
+          </a:p>
+          <a:p>
+            <a:r>
               <a:rPr lang="en-US" dirty="0"/>
-              <a:t>https://github.com/mitchelsellers/dotnetcoreloggingdemo</a:t>
+              <a:t>The Blazor app setup adds Aspire to the mix!</a:t>
             </a:r>
           </a:p>
         </p:txBody>
@@ -10449,6 +10661,19 @@
               <a:t>What we are talking about today</a:t>
             </a:r>
           </a:p>
+          <a:p>
+            <a:r>
+              <a:rPr lang="en-US" dirty="0"/>
+              <a:t>Telemetry</a:t>
+            </a:r>
+          </a:p>
+          <a:p>
+            <a:pPr lvl="1"/>
+            <a:r>
+              <a:rPr lang="en-US" dirty="0"/>
+              <a:t>Also on the docket for today</a:t>
+            </a:r>
+          </a:p>
         </p:txBody>
       </p:sp>
     </p:spTree>
@@ -11004,6 +11229,194 @@
                                           <p:spTgt spid="3">
                                             <p:txEl>
                                               <p:pRg st="5" end="5"/>
+                                            </p:txEl>
+                                          </p:spTgt>
+                                        </p:tgtEl>
+                                        <p:attrNameLst>
+                                          <p:attrName>ppt_y</p:attrName>
+                                        </p:attrNameLst>
+                                      </p:cBhvr>
+                                      <p:tavLst>
+                                        <p:tav tm="0">
+                                          <p:val>
+                                            <p:strVal val="1+#ppt_h/2"/>
+                                          </p:val>
+                                        </p:tav>
+                                        <p:tav tm="100000">
+                                          <p:val>
+                                            <p:strVal val="#ppt_y"/>
+                                          </p:val>
+                                        </p:tav>
+                                      </p:tavLst>
+                                    </p:anim>
+                                  </p:childTnLst>
+                                </p:cTn>
+                              </p:par>
+                            </p:childTnLst>
+                          </p:cTn>
+                        </p:par>
+                      </p:childTnLst>
+                    </p:cTn>
+                  </p:par>
+                  <p:par>
+                    <p:cTn id="33" fill="hold">
+                      <p:stCondLst>
+                        <p:cond delay="indefinite"/>
+                      </p:stCondLst>
+                      <p:childTnLst>
+                        <p:par>
+                          <p:cTn id="34" fill="hold">
+                            <p:stCondLst>
+                              <p:cond delay="0"/>
+                            </p:stCondLst>
+                            <p:childTnLst>
+                              <p:par>
+                                <p:cTn id="35" presetID="2" presetClass="entr" presetSubtype="4" fill="hold" grpId="0" nodeType="clickEffect">
+                                  <p:stCondLst>
+                                    <p:cond delay="0"/>
+                                  </p:stCondLst>
+                                  <p:childTnLst>
+                                    <p:set>
+                                      <p:cBhvr>
+                                        <p:cTn id="36" dur="1" fill="hold">
+                                          <p:stCondLst>
+                                            <p:cond delay="0"/>
+                                          </p:stCondLst>
+                                        </p:cTn>
+                                        <p:tgtEl>
+                                          <p:spTgt spid="3">
+                                            <p:txEl>
+                                              <p:pRg st="6" end="6"/>
+                                            </p:txEl>
+                                          </p:spTgt>
+                                        </p:tgtEl>
+                                        <p:attrNameLst>
+                                          <p:attrName>style.visibility</p:attrName>
+                                        </p:attrNameLst>
+                                      </p:cBhvr>
+                                      <p:to>
+                                        <p:strVal val="visible"/>
+                                      </p:to>
+                                    </p:set>
+                                    <p:anim calcmode="lin" valueType="num">
+                                      <p:cBhvr additive="base">
+                                        <p:cTn id="37" dur="500" fill="hold"/>
+                                        <p:tgtEl>
+                                          <p:spTgt spid="3">
+                                            <p:txEl>
+                                              <p:pRg st="6" end="6"/>
+                                            </p:txEl>
+                                          </p:spTgt>
+                                        </p:tgtEl>
+                                        <p:attrNameLst>
+                                          <p:attrName>ppt_x</p:attrName>
+                                        </p:attrNameLst>
+                                      </p:cBhvr>
+                                      <p:tavLst>
+                                        <p:tav tm="0">
+                                          <p:val>
+                                            <p:strVal val="#ppt_x"/>
+                                          </p:val>
+                                        </p:tav>
+                                        <p:tav tm="100000">
+                                          <p:val>
+                                            <p:strVal val="#ppt_x"/>
+                                          </p:val>
+                                        </p:tav>
+                                      </p:tavLst>
+                                    </p:anim>
+                                    <p:anim calcmode="lin" valueType="num">
+                                      <p:cBhvr additive="base">
+                                        <p:cTn id="38" dur="500" fill="hold"/>
+                                        <p:tgtEl>
+                                          <p:spTgt spid="3">
+                                            <p:txEl>
+                                              <p:pRg st="6" end="6"/>
+                                            </p:txEl>
+                                          </p:spTgt>
+                                        </p:tgtEl>
+                                        <p:attrNameLst>
+                                          <p:attrName>ppt_y</p:attrName>
+                                        </p:attrNameLst>
+                                      </p:cBhvr>
+                                      <p:tavLst>
+                                        <p:tav tm="0">
+                                          <p:val>
+                                            <p:strVal val="1+#ppt_h/2"/>
+                                          </p:val>
+                                        </p:tav>
+                                        <p:tav tm="100000">
+                                          <p:val>
+                                            <p:strVal val="#ppt_y"/>
+                                          </p:val>
+                                        </p:tav>
+                                      </p:tavLst>
+                                    </p:anim>
+                                  </p:childTnLst>
+                                </p:cTn>
+                              </p:par>
+                              <p:par>
+                                <p:cTn id="39" presetID="2" presetClass="entr" presetSubtype="4" fill="hold" grpId="0" nodeType="withEffect">
+                                  <p:stCondLst>
+                                    <p:cond delay="0"/>
+                                  </p:stCondLst>
+                                  <p:childTnLst>
+                                    <p:set>
+                                      <p:cBhvr>
+                                        <p:cTn id="40" dur="1" fill="hold">
+                                          <p:stCondLst>
+                                            <p:cond delay="0"/>
+                                          </p:stCondLst>
+                                        </p:cTn>
+                                        <p:tgtEl>
+                                          <p:spTgt spid="3">
+                                            <p:txEl>
+                                              <p:pRg st="7" end="7"/>
+                                            </p:txEl>
+                                          </p:spTgt>
+                                        </p:tgtEl>
+                                        <p:attrNameLst>
+                                          <p:attrName>style.visibility</p:attrName>
+                                        </p:attrNameLst>
+                                      </p:cBhvr>
+                                      <p:to>
+                                        <p:strVal val="visible"/>
+                                      </p:to>
+                                    </p:set>
+                                    <p:anim calcmode="lin" valueType="num">
+                                      <p:cBhvr additive="base">
+                                        <p:cTn id="41" dur="500" fill="hold"/>
+                                        <p:tgtEl>
+                                          <p:spTgt spid="3">
+                                            <p:txEl>
+                                              <p:pRg st="7" end="7"/>
+                                            </p:txEl>
+                                          </p:spTgt>
+                                        </p:tgtEl>
+                                        <p:attrNameLst>
+                                          <p:attrName>ppt_x</p:attrName>
+                                        </p:attrNameLst>
+                                      </p:cBhvr>
+                                      <p:tavLst>
+                                        <p:tav tm="0">
+                                          <p:val>
+                                            <p:strVal val="#ppt_x"/>
+                                          </p:val>
+                                        </p:tav>
+                                        <p:tav tm="100000">
+                                          <p:val>
+                                            <p:strVal val="#ppt_x"/>
+                                          </p:val>
+                                        </p:tav>
+                                      </p:tavLst>
+                                    </p:anim>
+                                    <p:anim calcmode="lin" valueType="num">
+                                      <p:cBhvr additive="base">
+                                        <p:cTn id="42" dur="500" fill="hold"/>
+                                        <p:tgtEl>
+                                          <p:spTgt spid="3">
+                                            <p:txEl>
+                                              <p:pRg st="7" end="7"/>
                                             </p:txEl>
                                           </p:spTgt>
                                         </p:tgtEl>
